--- a/m7/diapositivos/sessao-09-m7-f23.pptx
+++ b/m7/diapositivos/sessao-09-m7-f23.pptx
@@ -2862,7 +2862,63 @@
                 <a:ea typeface="Arial" pitchFamily="34" charset="-122"/>
                 <a:cs typeface="Arial" pitchFamily="34" charset="-120"/>
               </a:rPr>
-              <a:t>Ricardo Reis (11-7-1914), Odes de Ricardo Reis, Ática, 1946, 1.ª publ. Athena, n.º 1, Lisboa, outubro de 1924, Arquivo Pessoa</a:t>
+              <a:t>Ricardo Reis (11-7-1914), </a:t>
+            </a:r>
+            <a:pPr indent="0" marL="0">
+              <a:buNone/>
+            </a:pPr>
+            <a:r>
+              <a:rPr lang="en-US" sz="1200" i="1" dirty="0">
+                <a:solidFill>
+                  <a:srgbClr val="A9A79F"/>
+                </a:solidFill>
+                <a:latin typeface="Arial" pitchFamily="34" charset="0"/>
+                <a:ea typeface="Arial" pitchFamily="34" charset="-122"/>
+                <a:cs typeface="Arial" pitchFamily="34" charset="-120"/>
+              </a:rPr>
+              <a:t>Odes de Ricardo Reis</a:t>
+            </a:r>
+            <a:pPr indent="0" marL="0">
+              <a:buNone/>
+            </a:pPr>
+            <a:r>
+              <a:rPr lang="en-US" sz="1200" dirty="0">
+                <a:solidFill>
+                  <a:srgbClr val="A9A79F"/>
+                </a:solidFill>
+                <a:latin typeface="Arial" pitchFamily="34" charset="0"/>
+                <a:ea typeface="Arial" pitchFamily="34" charset="-122"/>
+                <a:cs typeface="Arial" pitchFamily="34" charset="-120"/>
+              </a:rPr>
+              <a:t>, Ática, 1946, 1.ª publ. </a:t>
+            </a:r>
+            <a:pPr indent="0" marL="0">
+              <a:buNone/>
+            </a:pPr>
+            <a:r>
+              <a:rPr lang="en-US" sz="1200" i="1" dirty="0">
+                <a:solidFill>
+                  <a:srgbClr val="A9A79F"/>
+                </a:solidFill>
+                <a:latin typeface="Arial" pitchFamily="34" charset="0"/>
+                <a:ea typeface="Arial" pitchFamily="34" charset="-122"/>
+                <a:cs typeface="Arial" pitchFamily="34" charset="-120"/>
+              </a:rPr>
+              <a:t>Athena</a:t>
+            </a:r>
+            <a:pPr indent="0" marL="0">
+              <a:buNone/>
+            </a:pPr>
+            <a:r>
+              <a:rPr lang="en-US" sz="1200" dirty="0">
+                <a:solidFill>
+                  <a:srgbClr val="A9A79F"/>
+                </a:solidFill>
+                <a:latin typeface="Arial" pitchFamily="34" charset="0"/>
+                <a:ea typeface="Arial" pitchFamily="34" charset="-122"/>
+                <a:cs typeface="Arial" pitchFamily="34" charset="-120"/>
+              </a:rPr>
+              <a:t>, n.º 1, Lisboa, outubro de 1924, Arquivo Pessoa</a:t>
             </a:r>
             <a:endParaRPr lang="en-US" sz="1200" dirty="0"/>
           </a:p>
@@ -4715,7 +4771,7 @@
               <a:buNone/>
             </a:pPr>
             <a:r>
-              <a:rPr lang="en-US" sz="2300" dirty="0">
+              <a:rPr lang="en-US" sz="2300" b="1" dirty="0">
                 <a:solidFill>
                   <a:srgbClr val="F2F0EA"/>
                 </a:solidFill>
@@ -4723,11 +4779,8 @@
                 <a:ea typeface="Georgia" pitchFamily="34" charset="-122"/>
                 <a:cs typeface="Georgia" pitchFamily="34" charset="-120"/>
               </a:rPr>
-              <a:t>Ode: poema de tom elevado, em estrofes regulares; Reis segue o modelo do poeta latino Horácio.</a:t>
-            </a:r>
-            <a:endParaRPr lang="en-US" sz="2300" dirty="0"/>
-          </a:p>
-          <a:p>
+              <a:t>Ode</a:t>
+            </a:r>
             <a:pPr indent="0" marL="0">
               <a:lnSpc>
                 <a:spcPct val="120000"/>
@@ -4746,11 +4799,8 @@
                 <a:ea typeface="Georgia" pitchFamily="34" charset="-122"/>
                 <a:cs typeface="Georgia" pitchFamily="34" charset="-120"/>
               </a:rPr>
-              <a:t>Epicurismo: procurar a tranquilidade com prazeres simples, sem excessos, e sem temer a morte.</a:t>
-            </a:r>
-            <a:endParaRPr lang="en-US" sz="2300" dirty="0"/>
-          </a:p>
-          <a:p>
+              <a:t>: poema de tom elevado, em estrofes regulares; Reis segue o modelo do poeta latino Horácio. </a:t>
+            </a:r>
             <a:pPr indent="0" marL="0">
               <a:lnSpc>
                 <a:spcPct val="120000"/>
@@ -4761,7 +4811,7 @@
               <a:buNone/>
             </a:pPr>
             <a:r>
-              <a:rPr lang="en-US" sz="2300" dirty="0">
+              <a:rPr lang="en-US" sz="2300" b="1" dirty="0">
                 <a:solidFill>
                   <a:srgbClr val="F2F0EA"/>
                 </a:solidFill>
@@ -4769,11 +4819,8 @@
                 <a:ea typeface="Georgia" pitchFamily="34" charset="-122"/>
                 <a:cs typeface="Georgia" pitchFamily="34" charset="-120"/>
               </a:rPr>
-              <a:t>Estoicismo: dominar as paixões e aceitar a ordem do mundo, incluindo a morte.</a:t>
-            </a:r>
-            <a:endParaRPr lang="en-US" sz="2300" dirty="0"/>
-          </a:p>
-          <a:p>
+              <a:t>Epicurismo</a:t>
+            </a:r>
             <a:pPr indent="0" marL="0">
               <a:lnSpc>
                 <a:spcPct val="120000"/>
@@ -4792,7 +4839,87 @@
                 <a:ea typeface="Georgia" pitchFamily="34" charset="-122"/>
                 <a:cs typeface="Georgia" pitchFamily="34" charset="-120"/>
               </a:rPr>
-              <a:t>Carpe diem: expressão latina que manda aproveitar o dia de hoje. Na lição «À beira do rio» viste esta maneira de viver; aqui dás-lhe nome.</a:t>
+              <a:t>: procurar a tranquilidade com prazeres simples, sem excessos, e sem temer a morte. </a:t>
+            </a:r>
+            <a:pPr indent="0" marL="0">
+              <a:lnSpc>
+                <a:spcPct val="120000"/>
+              </a:lnSpc>
+              <a:spcAft>
+                <a:spcPts val="1000"/>
+              </a:spcAft>
+              <a:buNone/>
+            </a:pPr>
+            <a:r>
+              <a:rPr lang="en-US" sz="2300" b="1" dirty="0">
+                <a:solidFill>
+                  <a:srgbClr val="F2F0EA"/>
+                </a:solidFill>
+                <a:latin typeface="Georgia" pitchFamily="34" charset="0"/>
+                <a:ea typeface="Georgia" pitchFamily="34" charset="-122"/>
+                <a:cs typeface="Georgia" pitchFamily="34" charset="-120"/>
+              </a:rPr>
+              <a:t>Estoicismo</a:t>
+            </a:r>
+            <a:pPr indent="0" marL="0">
+              <a:lnSpc>
+                <a:spcPct val="120000"/>
+              </a:lnSpc>
+              <a:spcAft>
+                <a:spcPts val="1000"/>
+              </a:spcAft>
+              <a:buNone/>
+            </a:pPr>
+            <a:r>
+              <a:rPr lang="en-US" sz="2300" dirty="0">
+                <a:solidFill>
+                  <a:srgbClr val="F2F0EA"/>
+                </a:solidFill>
+                <a:latin typeface="Georgia" pitchFamily="34" charset="0"/>
+                <a:ea typeface="Georgia" pitchFamily="34" charset="-122"/>
+                <a:cs typeface="Georgia" pitchFamily="34" charset="-120"/>
+              </a:rPr>
+              <a:t>: dominar as paixões e aceitar a ordem do mundo, incluindo a morte. </a:t>
+            </a:r>
+            <a:pPr indent="0" marL="0">
+              <a:lnSpc>
+                <a:spcPct val="120000"/>
+              </a:lnSpc>
+              <a:spcAft>
+                <a:spcPts val="1000"/>
+              </a:spcAft>
+              <a:buNone/>
+            </a:pPr>
+            <a:r>
+              <a:rPr lang="en-US" sz="2300" b="1" dirty="0">
+                <a:solidFill>
+                  <a:srgbClr val="F2F0EA"/>
+                </a:solidFill>
+                <a:latin typeface="Georgia" pitchFamily="34" charset="0"/>
+                <a:ea typeface="Georgia" pitchFamily="34" charset="-122"/>
+                <a:cs typeface="Georgia" pitchFamily="34" charset="-120"/>
+              </a:rPr>
+              <a:t>Carpe diem</a:t>
+            </a:r>
+            <a:pPr indent="0" marL="0">
+              <a:lnSpc>
+                <a:spcPct val="120000"/>
+              </a:lnSpc>
+              <a:spcAft>
+                <a:spcPts val="1000"/>
+              </a:spcAft>
+              <a:buNone/>
+            </a:pPr>
+            <a:r>
+              <a:rPr lang="en-US" sz="2300" dirty="0">
+                <a:solidFill>
+                  <a:srgbClr val="F2F0EA"/>
+                </a:solidFill>
+                <a:latin typeface="Georgia" pitchFamily="34" charset="0"/>
+                <a:ea typeface="Georgia" pitchFamily="34" charset="-122"/>
+                <a:cs typeface="Georgia" pitchFamily="34" charset="-120"/>
+              </a:rPr>
+              <a:t>: expressão latina que manda aproveitar o dia de hoje. Na lição «À beira do rio» viste esta maneira de viver; aqui dás-lhe nome.</a:t>
             </a:r>
             <a:endParaRPr lang="en-US" sz="2300" dirty="0"/>
           </a:p>
